--- a/DS101 Lecture #5.pptx
+++ b/DS101 Lecture #5.pptx
@@ -280,7 +280,7 @@
           <a:p>
             <a:fld id="{A1927168-93E5-4C47-869C-987DB890A332}" type="datetimeFigureOut">
               <a:rPr lang="en-US" smtClean="0"/>
-              <a:t>11/3/2025</a:t>
+              <a:t>11/17/2025</a:t>
             </a:fld>
             <a:endParaRPr lang="en-US"/>
           </a:p>
@@ -478,7 +478,7 @@
           <a:p>
             <a:fld id="{A1927168-93E5-4C47-869C-987DB890A332}" type="datetimeFigureOut">
               <a:rPr lang="en-US" smtClean="0"/>
-              <a:t>11/3/2025</a:t>
+              <a:t>11/17/2025</a:t>
             </a:fld>
             <a:endParaRPr lang="en-US"/>
           </a:p>
@@ -686,7 +686,7 @@
           <a:p>
             <a:fld id="{A1927168-93E5-4C47-869C-987DB890A332}" type="datetimeFigureOut">
               <a:rPr lang="en-US" smtClean="0"/>
-              <a:t>11/3/2025</a:t>
+              <a:t>11/17/2025</a:t>
             </a:fld>
             <a:endParaRPr lang="en-US"/>
           </a:p>
@@ -889,7 +889,7 @@
           <a:p>
             <a:fld id="{A1927168-93E5-4C47-869C-987DB890A332}" type="datetimeFigureOut">
               <a:rPr lang="en-US" smtClean="0"/>
-              <a:t>11/3/2025</a:t>
+              <a:t>11/17/2025</a:t>
             </a:fld>
             <a:endParaRPr lang="en-US"/>
           </a:p>
@@ -1209,7 +1209,7 @@
           <a:p>
             <a:fld id="{A1927168-93E5-4C47-869C-987DB890A332}" type="datetimeFigureOut">
               <a:rPr lang="en-US" smtClean="0"/>
-              <a:t>11/3/2025</a:t>
+              <a:t>11/17/2025</a:t>
             </a:fld>
             <a:endParaRPr lang="en-US"/>
           </a:p>
@@ -1474,7 +1474,7 @@
           <a:p>
             <a:fld id="{A1927168-93E5-4C47-869C-987DB890A332}" type="datetimeFigureOut">
               <a:rPr lang="en-US" smtClean="0"/>
-              <a:t>11/3/2025</a:t>
+              <a:t>11/17/2025</a:t>
             </a:fld>
             <a:endParaRPr lang="en-US"/>
           </a:p>
@@ -1886,7 +1886,7 @@
           <a:p>
             <a:fld id="{A1927168-93E5-4C47-869C-987DB890A332}" type="datetimeFigureOut">
               <a:rPr lang="en-US" smtClean="0"/>
-              <a:t>11/3/2025</a:t>
+              <a:t>11/17/2025</a:t>
             </a:fld>
             <a:endParaRPr lang="en-US"/>
           </a:p>
@@ -2027,7 +2027,7 @@
           <a:p>
             <a:fld id="{A1927168-93E5-4C47-869C-987DB890A332}" type="datetimeFigureOut">
               <a:rPr lang="en-US" smtClean="0"/>
-              <a:t>11/3/2025</a:t>
+              <a:t>11/17/2025</a:t>
             </a:fld>
             <a:endParaRPr lang="en-US"/>
           </a:p>
@@ -2140,7 +2140,7 @@
           <a:p>
             <a:fld id="{A1927168-93E5-4C47-869C-987DB890A332}" type="datetimeFigureOut">
               <a:rPr lang="en-US" smtClean="0"/>
-              <a:t>11/3/2025</a:t>
+              <a:t>11/17/2025</a:t>
             </a:fld>
             <a:endParaRPr lang="en-US"/>
           </a:p>
@@ -2451,7 +2451,7 @@
           <a:p>
             <a:fld id="{A1927168-93E5-4C47-869C-987DB890A332}" type="datetimeFigureOut">
               <a:rPr lang="en-US" smtClean="0"/>
-              <a:t>11/3/2025</a:t>
+              <a:t>11/17/2025</a:t>
             </a:fld>
             <a:endParaRPr lang="en-US"/>
           </a:p>
@@ -2739,7 +2739,7 @@
           <a:p>
             <a:fld id="{A1927168-93E5-4C47-869C-987DB890A332}" type="datetimeFigureOut">
               <a:rPr lang="en-US" smtClean="0"/>
-              <a:t>11/3/2025</a:t>
+              <a:t>11/17/2025</a:t>
             </a:fld>
             <a:endParaRPr lang="en-US"/>
           </a:p>
@@ -2986,7 +2986,7 @@
           <a:p>
             <a:fld id="{A1927168-93E5-4C47-869C-987DB890A332}" type="datetimeFigureOut">
               <a:rPr lang="en-US" smtClean="0"/>
-              <a:t>11/3/2025</a:t>
+              <a:t>11/17/2025</a:t>
             </a:fld>
             <a:endParaRPr lang="en-US"/>
           </a:p>
@@ -5864,6 +5864,25 @@
             </a:pPr>
             <a:r>
               <a:rPr lang="en-US" sz="3600" dirty="0"/>
+              <a:t>Repo/GitHub: ? (resources, </a:t>
+            </a:r>
+            <a:r>
+              <a:rPr lang="en-US" sz="3600" dirty="0" err="1"/>
+              <a:t>etc</a:t>
+            </a:r>
+            <a:r>
+              <a:rPr lang="en-US" sz="3600"/>
+              <a:t>)</a:t>
+            </a:r>
+          </a:p>
+          <a:p>
+            <a:pPr>
+              <a:lnSpc>
+                <a:spcPct val="150000"/>
+              </a:lnSpc>
+            </a:pPr>
+            <a:r>
+              <a:rPr lang="en-US" sz="3600" dirty="0"/>
               <a:t>Mandatory papers: clear ?</a:t>
             </a:r>
           </a:p>
